--- a/data/examples/converted_sample.pptx
+++ b/data/examples/converted_sample.pptx
@@ -24,12 +24,20 @@
       <p:grpSpPr/>
     </p:spTree>
   </p:cSld>
+  <p:clrMapOvr>
+    <a:masterClrMapping/>
+  </p:clrMapOvr>
 </p:sldLayout>
 </file>
 
 <file path=ppt/slideMasters/slideMaster1.xml><?xml version="1.0" encoding="utf-8"?>
 <p:sldMaster xmlns:a="http://schemas.openxmlformats.org/drawingml/2006/main" xmlns:r="http://schemas.openxmlformats.org/officeDocument/2006/relationships" xmlns:p="http://schemas.openxmlformats.org/presentationml/2006/main">
   <p:cSld>
+    <p:bg>
+      <p:bgRef idx="1001">
+        <a:schemeClr val="bg1"/>
+      </p:bgRef>
+    </p:bg>
     <p:spTree>
       <p:nvGrpSpPr>
         <p:cNvPr id="1" name=""/>
@@ -39,6 +47,7 @@
       <p:grpSpPr/>
     </p:spTree>
   </p:cSld>
+  <p:clrMap bg1="lt1" tx1="dk1" bg2="lt2" tx2="dk2" accent1="accent1" accent2="accent2" accent3="accent3" accent4="accent4" accent5="accent5" accent6="accent6" hlink="hlink" folHlink="folHlink"/>
   <p:sldLayoutIdLst>
     <p:sldLayoutId id="2147483649" r:id="rId1"/>
   </p:sldLayoutIdLst>
@@ -156,7 +165,7 @@
           <a:p>
             <a:r>
               <a:rPr lang="en-US" sz="1800"/>
-              <a:t>u2022 Pure functional XML parsing</a:t>
+              <a:t>• Pure functional XML parsing</a:t>
             </a:r>
           </a:p>
         </p:txBody>
@@ -182,7 +191,7 @@
           <a:p>
             <a:r>
               <a:rPr lang="en-US" sz="1800"/>
-              <a:t>u2022 AI-augmented layout understanding</a:t>
+              <a:t>• AI-augmented layout understanding</a:t>
             </a:r>
           </a:p>
         </p:txBody>
@@ -208,7 +217,7 @@
           <a:p>
             <a:r>
               <a:rPr lang="en-US" sz="1800"/>
-              <a:t>u2022 Bounded costs via capability budgets</a:t>
+              <a:t>• Bounded costs via capability budgets</a:t>
             </a:r>
           </a:p>
         </p:txBody>
@@ -484,13 +493,16 @@
       </p:sp>
     </p:spTree>
   </p:cSld>
+  <p:clrMapOvr>
+    <a:masterClrMapping/>
+  </p:clrMapOvr>
 </p:sld>
 </file>
 
 <file path=ppt/theme/theme1.xml><?xml version="1.0" encoding="utf-8"?>
-<a:theme xmlns:a="http://schemas.openxmlformats.org/drawingml/2006/main" name="DocParse">
+<a:theme xmlns:a="http://schemas.openxmlformats.org/drawingml/2006/main" name="AILANG Parse">
   <a:themeElements>
-    <a:clrScheme name="DocParse">
+    <a:clrScheme name="AILANG Parse">
       <a:dk1>
         <a:srgbClr val="000000"/>
       </a:dk1>
@@ -528,7 +540,7 @@
         <a:srgbClr val="800080"/>
       </a:folHlink>
     </a:clrScheme>
-    <a:fontScheme name="DocParse">
+    <a:fontScheme name="AILANG Parse">
       <a:majorFont>
         <a:latin typeface="Calibri"/>
         <a:ea typeface=""/>
@@ -540,7 +552,7 @@
         <a:cs typeface=""/>
       </a:minorFont>
     </a:fontScheme>
-    <a:fmtScheme name="DocParse">
+    <a:fmtScheme name="AILANG Parse">
       <a:fillStyleLst>
         <a:solidFill>
           <a:schemeClr val="phClr"/>
@@ -593,5 +605,7 @@
       </a:bgFillStyleLst>
     </a:fmtScheme>
   </a:themeElements>
+  <a:objectDefaults/>
+  <a:extraClrSchemeLst/>
 </a:theme>
 </file>